--- a/ppt/RAG02-LLM.pptx
+++ b/ppt/RAG02-LLM.pptx
@@ -3691,7 +3691,7 @@
         </p:nvSpPr>
         <p:spPr>
           <a:xfrm>
-            <a:off x="1115616" y="5661248"/>
+            <a:off x="1371599" y="5572223"/>
             <a:ext cx="6400800" cy="551554"/>
           </a:xfrm>
         </p:spPr>

--- a/ppt/RAG02-LLM.pptx
+++ b/ppt/RAG02-LLM.pptx
@@ -5,10 +5,10 @@
     <p:sldMasterId id="2147483653" r:id="rId1"/>
   </p:sldMasterIdLst>
   <p:notesMasterIdLst>
-    <p:notesMasterId r:id="rId29"/>
+    <p:notesMasterId r:id="rId31"/>
   </p:notesMasterIdLst>
   <p:handoutMasterIdLst>
-    <p:handoutMasterId r:id="rId30"/>
+    <p:handoutMasterId r:id="rId32"/>
   </p:handoutMasterIdLst>
   <p:sldIdLst>
     <p:sldId id="264" r:id="rId2"/>
@@ -38,6 +38,8 @@
     <p:sldId id="545" r:id="rId26"/>
     <p:sldId id="546" r:id="rId27"/>
     <p:sldId id="547" r:id="rId28"/>
+    <p:sldId id="548" r:id="rId29"/>
+    <p:sldId id="549" r:id="rId30"/>
   </p:sldIdLst>
   <p:sldSz cx="9144000" cy="6858000" type="screen4x3"/>
   <p:notesSz cx="6648450" cy="9782175"/>
@@ -3870,6 +3872,36 @@
           </a:p>
         </p:txBody>
       </p:sp>
+      <p:pic>
+        <p:nvPicPr>
+          <p:cNvPr id="5" name="Image 4">
+            <a:extLst>
+              <a:ext uri="{FF2B5EF4-FFF2-40B4-BE49-F238E27FC236}">
+                <a16:creationId xmlns:a16="http://schemas.microsoft.com/office/drawing/2014/main" id="{69B65E51-CD26-8726-F4FD-E1C0022F7447}"/>
+              </a:ext>
+            </a:extLst>
+          </p:cNvPr>
+          <p:cNvPicPr>
+            <a:picLocks noChangeAspect="1"/>
+          </p:cNvPicPr>
+          <p:nvPr/>
+        </p:nvPicPr>
+        <p:blipFill>
+          <a:blip r:embed="rId2"/>
+          <a:stretch>
+            <a:fillRect/>
+          </a:stretch>
+        </p:blipFill>
+        <p:spPr>
+          <a:xfrm>
+            <a:off x="395536" y="2708920"/>
+            <a:ext cx="8145012" cy="3343742"/>
+          </a:xfrm>
+          <a:prstGeom prst="rect">
+            <a:avLst/>
+          </a:prstGeom>
+        </p:spPr>
+      </p:pic>
     </p:spTree>
     <p:extLst>
       <p:ext uri="{BB962C8B-B14F-4D97-AF65-F5344CB8AC3E}">
@@ -6244,6 +6276,293 @@
     <p:extLst>
       <p:ext uri="{BB962C8B-B14F-4D97-AF65-F5344CB8AC3E}">
         <p14:creationId xmlns:p14="http://schemas.microsoft.com/office/powerpoint/2010/main" val="1071043598"/>
+      </p:ext>
+    </p:extLst>
+  </p:cSld>
+  <p:clrMapOvr>
+    <a:masterClrMapping/>
+  </p:clrMapOvr>
+</p:sld>
+</file>
+
+<file path=ppt/slides/slide28.xml><?xml version="1.0" encoding="utf-8"?>
+<p:sld xmlns:a="http://schemas.openxmlformats.org/drawingml/2006/main" xmlns:r="http://schemas.openxmlformats.org/officeDocument/2006/relationships" xmlns:p="http://schemas.openxmlformats.org/presentationml/2006/main">
+  <p:cSld>
+    <p:spTree>
+      <p:nvGrpSpPr>
+        <p:cNvPr id="1" name=""/>
+        <p:cNvGrpSpPr/>
+        <p:nvPr/>
+      </p:nvGrpSpPr>
+      <p:grpSpPr>
+        <a:xfrm>
+          <a:off x="0" y="0"/>
+          <a:ext cx="0" cy="0"/>
+          <a:chOff x="0" y="0"/>
+          <a:chExt cx="0" cy="0"/>
+        </a:xfrm>
+      </p:grpSpPr>
+      <p:sp>
+        <p:nvSpPr>
+          <p:cNvPr id="2" name="Titre 1">
+            <a:extLst>
+              <a:ext uri="{FF2B5EF4-FFF2-40B4-BE49-F238E27FC236}">
+                <a16:creationId xmlns:a16="http://schemas.microsoft.com/office/drawing/2014/main" id="{47AAE58E-75C5-4DE4-8EB6-22BD66D35E86}"/>
+              </a:ext>
+            </a:extLst>
+          </p:cNvPr>
+          <p:cNvSpPr>
+            <a:spLocks noGrp="1"/>
+          </p:cNvSpPr>
+          <p:nvPr>
+            <p:ph type="title"/>
+          </p:nvPr>
+        </p:nvSpPr>
+        <p:spPr/>
+        <p:txBody>
+          <a:bodyPr/>
+          <a:lstStyle/>
+          <a:p>
+            <a:r>
+              <a:rPr lang="fr-FR" dirty="0"/>
+              <a:t>Comment un LLM fonctionne ?</a:t>
+            </a:r>
+          </a:p>
+        </p:txBody>
+      </p:sp>
+      <p:sp>
+        <p:nvSpPr>
+          <p:cNvPr id="3" name="Espace réservé du contenu 2">
+            <a:extLst>
+              <a:ext uri="{FF2B5EF4-FFF2-40B4-BE49-F238E27FC236}">
+                <a16:creationId xmlns:a16="http://schemas.microsoft.com/office/drawing/2014/main" id="{FA97A39D-C744-9DAD-EAD5-25F102A5F412}"/>
+              </a:ext>
+            </a:extLst>
+          </p:cNvPr>
+          <p:cNvSpPr>
+            <a:spLocks noGrp="1"/>
+          </p:cNvSpPr>
+          <p:nvPr>
+            <p:ph idx="1"/>
+          </p:nvPr>
+        </p:nvSpPr>
+        <p:spPr/>
+        <p:txBody>
+          <a:bodyPr/>
+          <a:lstStyle/>
+          <a:p>
+            <a:r>
+              <a:rPr lang="fr-FR" dirty="0"/>
+              <a:t>Les LLM fonctionnent en 3 parties</a:t>
+            </a:r>
+          </a:p>
+          <a:p>
+            <a:pPr lvl="1"/>
+            <a:r>
+              <a:rPr lang="fr-FR" dirty="0"/>
+              <a:t>Un </a:t>
+            </a:r>
+            <a:r>
+              <a:rPr lang="fr-FR" dirty="0" err="1"/>
+              <a:t>tokenizer</a:t>
+            </a:r>
+            <a:endParaRPr lang="fr-FR" dirty="0"/>
+          </a:p>
+          <a:p>
+            <a:pPr lvl="1"/>
+            <a:r>
+              <a:rPr lang="fr-FR" dirty="0"/>
+              <a:t>Un encoder</a:t>
+            </a:r>
+          </a:p>
+          <a:p>
+            <a:pPr lvl="1"/>
+            <a:r>
+              <a:rPr lang="fr-FR" dirty="0"/>
+              <a:t>Un </a:t>
+            </a:r>
+            <a:r>
+              <a:rPr lang="fr-FR" dirty="0" err="1"/>
+              <a:t>decoder</a:t>
+            </a:r>
+            <a:endParaRPr lang="fr-FR" dirty="0"/>
+          </a:p>
+        </p:txBody>
+      </p:sp>
+      <p:pic>
+        <p:nvPicPr>
+          <p:cNvPr id="5" name="Image 4">
+            <a:extLst>
+              <a:ext uri="{FF2B5EF4-FFF2-40B4-BE49-F238E27FC236}">
+                <a16:creationId xmlns:a16="http://schemas.microsoft.com/office/drawing/2014/main" id="{1DCA10AC-030B-D2A1-826A-464FD55D273E}"/>
+              </a:ext>
+            </a:extLst>
+          </p:cNvPr>
+          <p:cNvPicPr>
+            <a:picLocks noChangeAspect="1"/>
+          </p:cNvPicPr>
+          <p:nvPr/>
+        </p:nvPicPr>
+        <p:blipFill>
+          <a:blip r:embed="rId2"/>
+          <a:stretch>
+            <a:fillRect/>
+          </a:stretch>
+        </p:blipFill>
+        <p:spPr>
+          <a:xfrm>
+            <a:off x="375652" y="3717032"/>
+            <a:ext cx="8392696" cy="2391109"/>
+          </a:xfrm>
+          <a:prstGeom prst="rect">
+            <a:avLst/>
+          </a:prstGeom>
+        </p:spPr>
+      </p:pic>
+    </p:spTree>
+    <p:extLst>
+      <p:ext uri="{BB962C8B-B14F-4D97-AF65-F5344CB8AC3E}">
+        <p14:creationId xmlns:p14="http://schemas.microsoft.com/office/powerpoint/2010/main" val="53285170"/>
+      </p:ext>
+    </p:extLst>
+  </p:cSld>
+  <p:clrMapOvr>
+    <a:masterClrMapping/>
+  </p:clrMapOvr>
+</p:sld>
+</file>
+
+<file path=ppt/slides/slide29.xml><?xml version="1.0" encoding="utf-8"?>
+<p:sld xmlns:a="http://schemas.openxmlformats.org/drawingml/2006/main" xmlns:r="http://schemas.openxmlformats.org/officeDocument/2006/relationships" xmlns:p="http://schemas.openxmlformats.org/presentationml/2006/main">
+  <p:cSld>
+    <p:spTree>
+      <p:nvGrpSpPr>
+        <p:cNvPr id="1" name=""/>
+        <p:cNvGrpSpPr/>
+        <p:nvPr/>
+      </p:nvGrpSpPr>
+      <p:grpSpPr>
+        <a:xfrm>
+          <a:off x="0" y="0"/>
+          <a:ext cx="0" cy="0"/>
+          <a:chOff x="0" y="0"/>
+          <a:chExt cx="0" cy="0"/>
+        </a:xfrm>
+      </p:grpSpPr>
+      <p:sp>
+        <p:nvSpPr>
+          <p:cNvPr id="2" name="Titre 1">
+            <a:extLst>
+              <a:ext uri="{FF2B5EF4-FFF2-40B4-BE49-F238E27FC236}">
+                <a16:creationId xmlns:a16="http://schemas.microsoft.com/office/drawing/2014/main" id="{AD402E54-5ECB-9C52-C714-D1FE27B7E11A}"/>
+              </a:ext>
+            </a:extLst>
+          </p:cNvPr>
+          <p:cNvSpPr>
+            <a:spLocks noGrp="1"/>
+          </p:cNvSpPr>
+          <p:nvPr>
+            <p:ph type="title"/>
+          </p:nvPr>
+        </p:nvSpPr>
+        <p:spPr/>
+        <p:txBody>
+          <a:bodyPr/>
+          <a:lstStyle/>
+          <a:p>
+            <a:endParaRPr lang="fr-FR"/>
+          </a:p>
+        </p:txBody>
+      </p:sp>
+      <p:sp>
+        <p:nvSpPr>
+          <p:cNvPr id="3" name="Espace réservé du contenu 2">
+            <a:extLst>
+              <a:ext uri="{FF2B5EF4-FFF2-40B4-BE49-F238E27FC236}">
+                <a16:creationId xmlns:a16="http://schemas.microsoft.com/office/drawing/2014/main" id="{1CEDA365-07EB-AFE6-D329-39E5A89DB254}"/>
+              </a:ext>
+            </a:extLst>
+          </p:cNvPr>
+          <p:cNvSpPr>
+            <a:spLocks noGrp="1"/>
+          </p:cNvSpPr>
+          <p:nvPr>
+            <p:ph idx="1"/>
+          </p:nvPr>
+        </p:nvSpPr>
+        <p:spPr/>
+        <p:txBody>
+          <a:bodyPr/>
+          <a:lstStyle/>
+          <a:p>
+            <a:endParaRPr lang="fr-FR"/>
+          </a:p>
+        </p:txBody>
+      </p:sp>
+      <p:pic>
+        <p:nvPicPr>
+          <p:cNvPr id="5" name="Image 4">
+            <a:extLst>
+              <a:ext uri="{FF2B5EF4-FFF2-40B4-BE49-F238E27FC236}">
+                <a16:creationId xmlns:a16="http://schemas.microsoft.com/office/drawing/2014/main" id="{F09ED587-AAB8-8ABB-FC90-54A180D237B8}"/>
+              </a:ext>
+            </a:extLst>
+          </p:cNvPr>
+          <p:cNvPicPr>
+            <a:picLocks noChangeAspect="1"/>
+          </p:cNvPicPr>
+          <p:nvPr/>
+        </p:nvPicPr>
+        <p:blipFill>
+          <a:blip r:embed="rId2"/>
+          <a:stretch>
+            <a:fillRect/>
+          </a:stretch>
+        </p:blipFill>
+        <p:spPr>
+          <a:xfrm>
+            <a:off x="390792" y="136248"/>
+            <a:ext cx="8573696" cy="2553056"/>
+          </a:xfrm>
+          <a:prstGeom prst="rect">
+            <a:avLst/>
+          </a:prstGeom>
+        </p:spPr>
+      </p:pic>
+      <p:pic>
+        <p:nvPicPr>
+          <p:cNvPr id="7" name="Image 6">
+            <a:extLst>
+              <a:ext uri="{FF2B5EF4-FFF2-40B4-BE49-F238E27FC236}">
+                <a16:creationId xmlns:a16="http://schemas.microsoft.com/office/drawing/2014/main" id="{7A4F28D3-E97D-461D-4F20-4CA0F3482B4F}"/>
+              </a:ext>
+            </a:extLst>
+          </p:cNvPr>
+          <p:cNvPicPr>
+            <a:picLocks noChangeAspect="1"/>
+          </p:cNvPicPr>
+          <p:nvPr/>
+        </p:nvPicPr>
+        <p:blipFill>
+          <a:blip r:embed="rId3"/>
+          <a:stretch>
+            <a:fillRect/>
+          </a:stretch>
+        </p:blipFill>
+        <p:spPr>
+          <a:xfrm>
+            <a:off x="1619672" y="2449505"/>
+            <a:ext cx="6386655" cy="4353533"/>
+          </a:xfrm>
+          <a:prstGeom prst="rect">
+            <a:avLst/>
+          </a:prstGeom>
+        </p:spPr>
+      </p:pic>
+    </p:spTree>
+    <p:extLst>
+      <p:ext uri="{BB962C8B-B14F-4D97-AF65-F5344CB8AC3E}">
+        <p14:creationId xmlns:p14="http://schemas.microsoft.com/office/powerpoint/2010/main" val="2410131168"/>
       </p:ext>
     </p:extLst>
   </p:cSld>
